--- a/dist/초1/국어/한글/초1_국어_한글_02_기본자음_학생용.pptx
+++ b/dist/초1/국어/한글/초1_국어_한글_02_기본자음_학생용.pptx
@@ -119,13 +119,13 @@
   <p:extLst>
     <p:ext uri="{521415D9-36F7-43E2-AB2F-B90AF26B5E84}">
       <p14:sectionLst xmlns:p14="http://schemas.microsoft.com/office/powerpoint/2010/main">
-        <p14:section name="도입" id="{dd1da40d-b45a-cd96-716c-1b387f53c223}">
+        <p14:section name="도입" id="{2b353884-d376-2889-34aa-6c10c4ce7f36}">
           <p14:sldIdLst>
             <p14:sldId id="256"/>
             <p14:sldId id="257"/>
           </p14:sldIdLst>
         </p14:section>
-        <p14:section name="개념" id="{67b92aa3-ca14-84bb-e760-9d5ebd510226}">
+        <p14:section name="개념" id="{6a4dddc4-ba75-1f95-650f-911eafccd5e9}">
           <p14:sldIdLst>
             <p14:sldId id="258"/>
             <p14:sldId id="259"/>
@@ -133,25 +133,25 @@
             <p14:sldId id="261"/>
           </p14:sldIdLst>
         </p14:section>
-        <p14:section name="연습" id="{3af5015d-32e5-5807-62c4-a6ced1508b8d}">
+        <p14:section name="연습" id="{d0a90ff0-0c00-e014-46ab-a14e9d01ddd6}">
           <p14:sldIdLst>
             <p14:sldId id="262"/>
             <p14:sldId id="263"/>
             <p14:sldId id="264"/>
           </p14:sldIdLst>
         </p14:section>
-        <p14:section name="확인" id="{3b4b45d4-b5fa-e856-2aa5-866b59689c92}">
+        <p14:section name="확인" id="{b3a7c067-ad63-68cb-3e10-88e4abf4869c}">
           <p14:sldIdLst>
             <p14:sldId id="265"/>
             <p14:sldId id="266"/>
           </p14:sldIdLst>
         </p14:section>
-        <p14:section name="정리" id="{788ce05a-f8de-f699-8124-fea85ded875e}">
+        <p14:section name="정리" id="{027ada62-af4a-7d72-50b3-b448f7b45362}">
           <p14:sldIdLst>
             <p14:sldId id="267"/>
           </p14:sldIdLst>
         </p14:section>
-        <p14:section name="보충" id="{0ee971ce-2870-85cd-8d77-6bf2810f90d7}">
+        <p14:section name="보충" id="{b4893362-c134-b8e6-a082-063a84cfe99c}">
           <p14:sldIdLst>
             <p14:sldId id="268"/>
           </p14:sldIdLst>
@@ -7903,12 +7903,12 @@
         </p:nvSpPr>
         <p:spPr>
           <a:xfrm>
-            <a:off x="2318004" y="2125980"/>
-            <a:ext cx="1737360" cy="1737360"/>
+            <a:off x="1403604" y="1897380"/>
+            <a:ext cx="2194560" cy="2194560"/>
           </a:xfrm>
           <a:prstGeom prst="roundRect">
             <a:avLst>
-              <a:gd name="adj" fmla="val 7368"/>
+              <a:gd name="adj" fmla="val 5833"/>
             </a:avLst>
           </a:prstGeom>
           <a:solidFill>
@@ -7928,7 +7928,7 @@
               <a:buNone/>
             </a:pPr>
             <a:r>
-              <a:rPr lang="ko-KR" altLang="en-US" sz="7500" b="1" dirty="0">
+              <a:rPr lang="ko-KR" altLang="en-US" sz="9500" b="1" dirty="0">
                 <a:solidFill>
                   <a:srgbClr val="1F2937"/>
                 </a:solidFill>
@@ -7938,7 +7938,7 @@
               </a:rPr>
               <a:t>ㄱ</a:t>
             </a:r>
-            <a:endParaRPr lang="ko-KR" sz="7500" dirty="0"/>
+            <a:endParaRPr lang="ko-KR" sz="9500" dirty="0"/>
           </a:p>
         </p:txBody>
       </p:sp>
@@ -7950,8 +7950,8 @@
         </p:nvSpPr>
         <p:spPr>
           <a:xfrm>
-            <a:off x="2217420" y="3899916"/>
-            <a:ext cx="1938528" cy="402336"/>
+            <a:off x="1303020" y="4128516"/>
+            <a:ext cx="2395728" cy="402336"/>
           </a:xfrm>
           <a:prstGeom prst="rect">
             <a:avLst/>
@@ -7989,12 +7989,12 @@
         </p:nvSpPr>
         <p:spPr>
           <a:xfrm>
-            <a:off x="4256532" y="2125980"/>
-            <a:ext cx="1737360" cy="1737360"/>
+            <a:off x="3799332" y="1897380"/>
+            <a:ext cx="2194560" cy="2194560"/>
           </a:xfrm>
           <a:prstGeom prst="roundRect">
             <a:avLst>
-              <a:gd name="adj" fmla="val 7368"/>
+              <a:gd name="adj" fmla="val 5833"/>
             </a:avLst>
           </a:prstGeom>
           <a:solidFill>
@@ -8014,7 +8014,7 @@
               <a:buNone/>
             </a:pPr>
             <a:r>
-              <a:rPr lang="ko-KR" altLang="en-US" sz="7500" b="1" dirty="0">
+              <a:rPr lang="ko-KR" altLang="en-US" sz="9500" b="1" dirty="0">
                 <a:solidFill>
                   <a:srgbClr val="1F2937"/>
                 </a:solidFill>
@@ -8024,7 +8024,7 @@
               </a:rPr>
               <a:t>ㄴ</a:t>
             </a:r>
-            <a:endParaRPr lang="ko-KR" sz="7500" dirty="0"/>
+            <a:endParaRPr lang="ko-KR" sz="9500" dirty="0"/>
           </a:p>
         </p:txBody>
       </p:sp>
@@ -8036,8 +8036,8 @@
         </p:nvSpPr>
         <p:spPr>
           <a:xfrm>
-            <a:off x="4155948" y="3899916"/>
-            <a:ext cx="1938528" cy="402336"/>
+            <a:off x="3698748" y="4128516"/>
+            <a:ext cx="2395728" cy="402336"/>
           </a:xfrm>
           <a:prstGeom prst="rect">
             <a:avLst/>
@@ -8075,12 +8075,12 @@
         </p:nvSpPr>
         <p:spPr>
           <a:xfrm>
-            <a:off x="6195060" y="2125980"/>
-            <a:ext cx="1737360" cy="1737360"/>
+            <a:off x="6195060" y="1897380"/>
+            <a:ext cx="2194560" cy="2194560"/>
           </a:xfrm>
           <a:prstGeom prst="roundRect">
             <a:avLst>
-              <a:gd name="adj" fmla="val 7368"/>
+              <a:gd name="adj" fmla="val 5833"/>
             </a:avLst>
           </a:prstGeom>
           <a:solidFill>
@@ -8100,7 +8100,7 @@
               <a:buNone/>
             </a:pPr>
             <a:r>
-              <a:rPr lang="ko-KR" altLang="en-US" sz="7500" b="1" dirty="0">
+              <a:rPr lang="ko-KR" altLang="en-US" sz="9500" b="1" dirty="0">
                 <a:solidFill>
                   <a:srgbClr val="1F2937"/>
                 </a:solidFill>
@@ -8110,7 +8110,7 @@
               </a:rPr>
               <a:t>ㅁ</a:t>
             </a:r>
-            <a:endParaRPr lang="ko-KR" sz="7500" dirty="0"/>
+            <a:endParaRPr lang="ko-KR" sz="9500" dirty="0"/>
           </a:p>
         </p:txBody>
       </p:sp>
@@ -8122,8 +8122,8 @@
         </p:nvSpPr>
         <p:spPr>
           <a:xfrm>
-            <a:off x="6094476" y="3899916"/>
-            <a:ext cx="1938528" cy="402336"/>
+            <a:off x="6094476" y="4128516"/>
+            <a:ext cx="2395728" cy="402336"/>
           </a:xfrm>
           <a:prstGeom prst="rect">
             <a:avLst/>
@@ -8161,12 +8161,12 @@
         </p:nvSpPr>
         <p:spPr>
           <a:xfrm>
-            <a:off x="8133588" y="2125980"/>
-            <a:ext cx="1737360" cy="1737360"/>
+            <a:off x="8590788" y="1897380"/>
+            <a:ext cx="2194560" cy="2194560"/>
           </a:xfrm>
           <a:prstGeom prst="roundRect">
             <a:avLst>
-              <a:gd name="adj" fmla="val 7368"/>
+              <a:gd name="adj" fmla="val 5833"/>
             </a:avLst>
           </a:prstGeom>
           <a:solidFill>
@@ -8186,7 +8186,7 @@
               <a:buNone/>
             </a:pPr>
             <a:r>
-              <a:rPr lang="ko-KR" altLang="en-US" sz="7500" b="1" dirty="0">
+              <a:rPr lang="ko-KR" altLang="en-US" sz="9500" b="1" dirty="0">
                 <a:solidFill>
                   <a:srgbClr val="1F2937"/>
                 </a:solidFill>
@@ -8196,7 +8196,7 @@
               </a:rPr>
               <a:t>ㅅ</a:t>
             </a:r>
-            <a:endParaRPr lang="ko-KR" sz="7500" dirty="0"/>
+            <a:endParaRPr lang="ko-KR" sz="9500" dirty="0"/>
           </a:p>
         </p:txBody>
       </p:sp>
@@ -8208,8 +8208,8 @@
         </p:nvSpPr>
         <p:spPr>
           <a:xfrm>
-            <a:off x="8033004" y="3899916"/>
-            <a:ext cx="1938528" cy="402336"/>
+            <a:off x="8490204" y="4128516"/>
+            <a:ext cx="2395728" cy="402336"/>
           </a:xfrm>
           <a:prstGeom prst="rect">
             <a:avLst/>

--- a/dist/초1/국어/한글/초1_국어_한글_02_기본자음_학생용.pptx
+++ b/dist/초1/국어/한글/초1_국어_한글_02_기본자음_학생용.pptx
@@ -119,13 +119,13 @@
   <p:extLst>
     <p:ext uri="{521415D9-36F7-43E2-AB2F-B90AF26B5E84}">
       <p14:sectionLst xmlns:p14="http://schemas.microsoft.com/office/powerpoint/2010/main">
-        <p14:section name="도입" id="{2b353884-d376-2889-34aa-6c10c4ce7f36}">
+        <p14:section name="도입" id="{cc30e0ef-742f-c6ae-5ae0-e11a2d3d53d8}">
           <p14:sldIdLst>
             <p14:sldId id="256"/>
             <p14:sldId id="257"/>
           </p14:sldIdLst>
         </p14:section>
-        <p14:section name="개념" id="{6a4dddc4-ba75-1f95-650f-911eafccd5e9}">
+        <p14:section name="개념" id="{dde48bce-4fb9-a2c8-11f8-5df95817906b}">
           <p14:sldIdLst>
             <p14:sldId id="258"/>
             <p14:sldId id="259"/>
@@ -133,25 +133,25 @@
             <p14:sldId id="261"/>
           </p14:sldIdLst>
         </p14:section>
-        <p14:section name="연습" id="{d0a90ff0-0c00-e014-46ab-a14e9d01ddd6}">
+        <p14:section name="연습" id="{b4b66aa3-281a-5519-847c-40b8f0cfd313}">
           <p14:sldIdLst>
             <p14:sldId id="262"/>
             <p14:sldId id="263"/>
             <p14:sldId id="264"/>
           </p14:sldIdLst>
         </p14:section>
-        <p14:section name="확인" id="{b3a7c067-ad63-68cb-3e10-88e4abf4869c}">
+        <p14:section name="확인" id="{3c7aa034-e742-11f5-7e93-e593355877fa}">
           <p14:sldIdLst>
             <p14:sldId id="265"/>
             <p14:sldId id="266"/>
           </p14:sldIdLst>
         </p14:section>
-        <p14:section name="정리" id="{027ada62-af4a-7d72-50b3-b448f7b45362}">
+        <p14:section name="정리" id="{0b8d4fc3-1558-b573-ac06-a3b4add5ebfb}">
           <p14:sldIdLst>
             <p14:sldId id="267"/>
           </p14:sldIdLst>
         </p14:section>
-        <p14:section name="보충" id="{b4893362-c134-b8e6-a082-063a84cfe99c}">
+        <p14:section name="보충" id="{7967dd68-4e11-e1ab-df6e-e8b15675ecfc}">
           <p14:sldIdLst>
             <p14:sldId id="268"/>
           </p14:sldIdLst>
@@ -3211,12 +3211,12 @@
         </p:nvSpPr>
         <p:spPr>
           <a:xfrm>
-            <a:off x="1344168" y="2017776"/>
-            <a:ext cx="1267968" cy="1267968"/>
+            <a:off x="1965960" y="2011680"/>
+            <a:ext cx="1280160" cy="1280160"/>
           </a:xfrm>
           <a:prstGeom prst="roundRect">
             <a:avLst>
-              <a:gd name="adj" fmla="val 10096"/>
+              <a:gd name="adj" fmla="val 10000"/>
             </a:avLst>
           </a:prstGeom>
           <a:solidFill>
@@ -3258,12 +3258,12 @@
         </p:nvSpPr>
         <p:spPr>
           <a:xfrm>
-            <a:off x="2813304" y="2017776"/>
-            <a:ext cx="1267968" cy="1267968"/>
+            <a:off x="3447288" y="2011680"/>
+            <a:ext cx="1280160" cy="1280160"/>
           </a:xfrm>
           <a:prstGeom prst="roundRect">
             <a:avLst>
-              <a:gd name="adj" fmla="val 10096"/>
+              <a:gd name="adj" fmla="val 10000"/>
             </a:avLst>
           </a:prstGeom>
           <a:solidFill>
@@ -3305,12 +3305,12 @@
         </p:nvSpPr>
         <p:spPr>
           <a:xfrm>
-            <a:off x="4282440" y="2017776"/>
-            <a:ext cx="1267968" cy="1267968"/>
+            <a:off x="4928616" y="2011680"/>
+            <a:ext cx="1280160" cy="1280160"/>
           </a:xfrm>
           <a:prstGeom prst="roundRect">
             <a:avLst>
-              <a:gd name="adj" fmla="val 10096"/>
+              <a:gd name="adj" fmla="val 10000"/>
             </a:avLst>
           </a:prstGeom>
           <a:solidFill>
@@ -3399,12 +3399,12 @@
         </p:nvSpPr>
         <p:spPr>
           <a:xfrm>
-            <a:off x="1344168" y="3480816"/>
-            <a:ext cx="1267968" cy="1267968"/>
+            <a:off x="1965960" y="3474720"/>
+            <a:ext cx="1280160" cy="1280160"/>
           </a:xfrm>
           <a:prstGeom prst="roundRect">
             <a:avLst>
-              <a:gd name="adj" fmla="val 10096"/>
+              <a:gd name="adj" fmla="val 10000"/>
             </a:avLst>
           </a:prstGeom>
           <a:solidFill>
@@ -3446,12 +3446,12 @@
         </p:nvSpPr>
         <p:spPr>
           <a:xfrm>
-            <a:off x="2813304" y="3480816"/>
-            <a:ext cx="1267968" cy="1267968"/>
+            <a:off x="3447288" y="3474720"/>
+            <a:ext cx="1280160" cy="1280160"/>
           </a:xfrm>
           <a:prstGeom prst="roundRect">
             <a:avLst>
-              <a:gd name="adj" fmla="val 10096"/>
+              <a:gd name="adj" fmla="val 10000"/>
             </a:avLst>
           </a:prstGeom>
           <a:solidFill>
@@ -3493,12 +3493,12 @@
         </p:nvSpPr>
         <p:spPr>
           <a:xfrm>
-            <a:off x="4282440" y="3480816"/>
-            <a:ext cx="1267968" cy="1267968"/>
+            <a:off x="4928616" y="3474720"/>
+            <a:ext cx="1280160" cy="1280160"/>
           </a:xfrm>
           <a:prstGeom prst="roundRect">
             <a:avLst>
-              <a:gd name="adj" fmla="val 10096"/>
+              <a:gd name="adj" fmla="val 10000"/>
             </a:avLst>
           </a:prstGeom>
           <a:solidFill>
@@ -3587,12 +3587,12 @@
         </p:nvSpPr>
         <p:spPr>
           <a:xfrm>
-            <a:off x="1344168" y="4943856"/>
-            <a:ext cx="1267968" cy="1267968"/>
+            <a:off x="1965960" y="4937760"/>
+            <a:ext cx="1280160" cy="1280160"/>
           </a:xfrm>
           <a:prstGeom prst="roundRect">
             <a:avLst>
-              <a:gd name="adj" fmla="val 10096"/>
+              <a:gd name="adj" fmla="val 10000"/>
             </a:avLst>
           </a:prstGeom>
           <a:solidFill>
@@ -3634,12 +3634,12 @@
         </p:nvSpPr>
         <p:spPr>
           <a:xfrm>
-            <a:off x="2813304" y="4943856"/>
-            <a:ext cx="1267968" cy="1267968"/>
+            <a:off x="3447288" y="4937760"/>
+            <a:ext cx="1280160" cy="1280160"/>
           </a:xfrm>
           <a:prstGeom prst="roundRect">
             <a:avLst>
-              <a:gd name="adj" fmla="val 10096"/>
+              <a:gd name="adj" fmla="val 10000"/>
             </a:avLst>
           </a:prstGeom>
           <a:solidFill>
@@ -3681,12 +3681,12 @@
         </p:nvSpPr>
         <p:spPr>
           <a:xfrm>
-            <a:off x="4282440" y="4943856"/>
-            <a:ext cx="1267968" cy="1267968"/>
+            <a:off x="4928616" y="4937760"/>
+            <a:ext cx="1280160" cy="1280160"/>
           </a:xfrm>
           <a:prstGeom prst="roundRect">
             <a:avLst>
-              <a:gd name="adj" fmla="val 10096"/>
+              <a:gd name="adj" fmla="val 10000"/>
             </a:avLst>
           </a:prstGeom>
           <a:solidFill>
@@ -9327,12 +9327,12 @@
         </p:nvSpPr>
         <p:spPr>
           <a:xfrm>
-            <a:off x="1344168" y="2109216"/>
-            <a:ext cx="1267968" cy="1267968"/>
+            <a:off x="1369314" y="2057400"/>
+            <a:ext cx="1371600" cy="1371600"/>
           </a:xfrm>
           <a:prstGeom prst="roundRect">
             <a:avLst>
-              <a:gd name="adj" fmla="val 10096"/>
+              <a:gd name="adj" fmla="val 9333"/>
             </a:avLst>
           </a:prstGeom>
           <a:solidFill>
@@ -9352,7 +9352,7 @@
               <a:buNone/>
             </a:pPr>
             <a:r>
-              <a:rPr lang="ko-KR" altLang="en-US" sz="5500" b="1" dirty="0">
+              <a:rPr lang="ko-KR" altLang="en-US" sz="5900" b="1" dirty="0">
                 <a:solidFill>
                   <a:srgbClr val="1F2937"/>
                 </a:solidFill>
@@ -9362,7 +9362,7 @@
               </a:rPr>
               <a:t>ㄱ</a:t>
             </a:r>
-            <a:endParaRPr lang="ko-KR" sz="5500" dirty="0"/>
+            <a:endParaRPr lang="ko-KR" sz="5900" dirty="0"/>
           </a:p>
         </p:txBody>
       </p:sp>
@@ -9374,12 +9374,12 @@
         </p:nvSpPr>
         <p:spPr>
           <a:xfrm>
-            <a:off x="2813304" y="2109216"/>
-            <a:ext cx="1267968" cy="1267968"/>
+            <a:off x="2942082" y="2057400"/>
+            <a:ext cx="1371600" cy="1371600"/>
           </a:xfrm>
           <a:prstGeom prst="roundRect">
             <a:avLst>
-              <a:gd name="adj" fmla="val 10096"/>
+              <a:gd name="adj" fmla="val 9333"/>
             </a:avLst>
           </a:prstGeom>
           <a:solidFill>
@@ -9399,7 +9399,7 @@
               <a:buNone/>
             </a:pPr>
             <a:r>
-              <a:rPr lang="ko-KR" altLang="en-US" sz="5500" b="1" dirty="0">
+              <a:rPr lang="ko-KR" altLang="en-US" sz="5900" b="1" dirty="0">
                 <a:solidFill>
                   <a:srgbClr val="1F2937"/>
                 </a:solidFill>
@@ -9409,7 +9409,7 @@
               </a:rPr>
               <a:t>ㄴ</a:t>
             </a:r>
-            <a:endParaRPr lang="ko-KR" sz="5500" dirty="0"/>
+            <a:endParaRPr lang="ko-KR" sz="5900" dirty="0"/>
           </a:p>
         </p:txBody>
       </p:sp>
@@ -9421,12 +9421,12 @@
         </p:nvSpPr>
         <p:spPr>
           <a:xfrm>
-            <a:off x="4282440" y="2109216"/>
-            <a:ext cx="1267968" cy="1267968"/>
+            <a:off x="4514850" y="2057400"/>
+            <a:ext cx="1371600" cy="1371600"/>
           </a:xfrm>
           <a:prstGeom prst="roundRect">
             <a:avLst>
-              <a:gd name="adj" fmla="val 10096"/>
+              <a:gd name="adj" fmla="val 9333"/>
             </a:avLst>
           </a:prstGeom>
           <a:solidFill>
@@ -9446,7 +9446,7 @@
               <a:buNone/>
             </a:pPr>
             <a:r>
-              <a:rPr lang="ko-KR" altLang="en-US" sz="5500" b="1" dirty="0">
+              <a:rPr lang="ko-KR" altLang="en-US" sz="5900" b="1" dirty="0">
                 <a:solidFill>
                   <a:srgbClr val="1F2937"/>
                 </a:solidFill>
@@ -9456,7 +9456,7 @@
               </a:rPr>
               <a:t>ㅁ</a:t>
             </a:r>
-            <a:endParaRPr lang="ko-KR" sz="5500" dirty="0"/>
+            <a:endParaRPr lang="ko-KR" sz="5900" dirty="0"/>
           </a:p>
         </p:txBody>
       </p:sp>
@@ -9515,12 +9515,12 @@
         </p:nvSpPr>
         <p:spPr>
           <a:xfrm>
-            <a:off x="7072884" y="2109216"/>
-            <a:ext cx="1267968" cy="1267968"/>
+            <a:off x="7098030" y="2057400"/>
+            <a:ext cx="1371600" cy="1371600"/>
           </a:xfrm>
           <a:prstGeom prst="roundRect">
             <a:avLst>
-              <a:gd name="adj" fmla="val 10096"/>
+              <a:gd name="adj" fmla="val 9333"/>
             </a:avLst>
           </a:prstGeom>
           <a:solidFill>
@@ -9540,7 +9540,7 @@
               <a:buNone/>
             </a:pPr>
             <a:r>
-              <a:rPr lang="ko-KR" altLang="en-US" sz="5500" b="1" dirty="0">
+              <a:rPr lang="ko-KR" altLang="en-US" sz="5900" b="1" dirty="0">
                 <a:solidFill>
                   <a:srgbClr val="1F2937"/>
                 </a:solidFill>
@@ -9550,7 +9550,7 @@
               </a:rPr>
               <a:t>ㅂ</a:t>
             </a:r>
-            <a:endParaRPr lang="ko-KR" sz="5500" dirty="0"/>
+            <a:endParaRPr lang="ko-KR" sz="5900" dirty="0"/>
           </a:p>
         </p:txBody>
       </p:sp>
@@ -9562,12 +9562,12 @@
         </p:nvSpPr>
         <p:spPr>
           <a:xfrm>
-            <a:off x="8542020" y="2109216"/>
-            <a:ext cx="1267968" cy="1267968"/>
+            <a:off x="8670798" y="2057400"/>
+            <a:ext cx="1371600" cy="1371600"/>
           </a:xfrm>
           <a:prstGeom prst="roundRect">
             <a:avLst>
-              <a:gd name="adj" fmla="val 10096"/>
+              <a:gd name="adj" fmla="val 9333"/>
             </a:avLst>
           </a:prstGeom>
           <a:solidFill>
@@ -9587,7 +9587,7 @@
               <a:buNone/>
             </a:pPr>
             <a:r>
-              <a:rPr lang="ko-KR" altLang="en-US" sz="5500" b="1" dirty="0">
+              <a:rPr lang="ko-KR" altLang="en-US" sz="5900" b="1" dirty="0">
                 <a:solidFill>
                   <a:srgbClr val="1F2937"/>
                 </a:solidFill>
@@ -9597,7 +9597,7 @@
               </a:rPr>
               <a:t>ㅅ</a:t>
             </a:r>
-            <a:endParaRPr lang="ko-KR" sz="5500" dirty="0"/>
+            <a:endParaRPr lang="ko-KR" sz="5900" dirty="0"/>
           </a:p>
         </p:txBody>
       </p:sp>
@@ -9609,12 +9609,12 @@
         </p:nvSpPr>
         <p:spPr>
           <a:xfrm>
-            <a:off x="10011156" y="2109216"/>
-            <a:ext cx="1267968" cy="1267968"/>
+            <a:off x="10243566" y="2057400"/>
+            <a:ext cx="1371600" cy="1371600"/>
           </a:xfrm>
           <a:prstGeom prst="roundRect">
             <a:avLst>
-              <a:gd name="adj" fmla="val 10096"/>
+              <a:gd name="adj" fmla="val 9333"/>
             </a:avLst>
           </a:prstGeom>
           <a:solidFill>
@@ -9634,7 +9634,7 @@
               <a:buNone/>
             </a:pPr>
             <a:r>
-              <a:rPr lang="ko-KR" altLang="en-US" sz="5500" b="1" dirty="0">
+              <a:rPr lang="ko-KR" altLang="en-US" sz="5900" b="1" dirty="0">
                 <a:solidFill>
                   <a:srgbClr val="1F2937"/>
                 </a:solidFill>
@@ -9644,7 +9644,7 @@
               </a:rPr>
               <a:t>ㅈ</a:t>
             </a:r>
-            <a:endParaRPr lang="ko-KR" sz="5500" dirty="0"/>
+            <a:endParaRPr lang="ko-KR" sz="5900" dirty="0"/>
           </a:p>
         </p:txBody>
       </p:sp>
@@ -9703,12 +9703,12 @@
         </p:nvSpPr>
         <p:spPr>
           <a:xfrm>
-            <a:off x="1344168" y="3755136"/>
-            <a:ext cx="1267968" cy="1267968"/>
+            <a:off x="1369314" y="3703320"/>
+            <a:ext cx="1371600" cy="1371600"/>
           </a:xfrm>
           <a:prstGeom prst="roundRect">
             <a:avLst>
-              <a:gd name="adj" fmla="val 10096"/>
+              <a:gd name="adj" fmla="val 9333"/>
             </a:avLst>
           </a:prstGeom>
           <a:solidFill>
@@ -9728,7 +9728,7 @@
               <a:buNone/>
             </a:pPr>
             <a:r>
-              <a:rPr lang="ko-KR" altLang="en-US" sz="5500" b="1" dirty="0">
+              <a:rPr lang="ko-KR" altLang="en-US" sz="5900" b="1" dirty="0">
                 <a:solidFill>
                   <a:srgbClr val="1F2937"/>
                 </a:solidFill>
@@ -9738,7 +9738,7 @@
               </a:rPr>
               <a:t>ㄷ</a:t>
             </a:r>
-            <a:endParaRPr lang="ko-KR" sz="5500" dirty="0"/>
+            <a:endParaRPr lang="ko-KR" sz="5900" dirty="0"/>
           </a:p>
         </p:txBody>
       </p:sp>
@@ -9750,12 +9750,12 @@
         </p:nvSpPr>
         <p:spPr>
           <a:xfrm>
-            <a:off x="2813304" y="3755136"/>
-            <a:ext cx="1267968" cy="1267968"/>
+            <a:off x="2942082" y="3703320"/>
+            <a:ext cx="1371600" cy="1371600"/>
           </a:xfrm>
           <a:prstGeom prst="roundRect">
             <a:avLst>
-              <a:gd name="adj" fmla="val 10096"/>
+              <a:gd name="adj" fmla="val 9333"/>
             </a:avLst>
           </a:prstGeom>
           <a:solidFill>
@@ -9775,7 +9775,7 @@
               <a:buNone/>
             </a:pPr>
             <a:r>
-              <a:rPr lang="ko-KR" altLang="en-US" sz="5500" b="1" dirty="0">
+              <a:rPr lang="ko-KR" altLang="en-US" sz="5900" b="1" dirty="0">
                 <a:solidFill>
                   <a:srgbClr val="1F2937"/>
                 </a:solidFill>
@@ -9785,7 +9785,7 @@
               </a:rPr>
               <a:t>ㅌ</a:t>
             </a:r>
-            <a:endParaRPr lang="ko-KR" sz="5500" dirty="0"/>
+            <a:endParaRPr lang="ko-KR" sz="5900" dirty="0"/>
           </a:p>
         </p:txBody>
       </p:sp>
@@ -9797,12 +9797,12 @@
         </p:nvSpPr>
         <p:spPr>
           <a:xfrm>
-            <a:off x="4282440" y="3755136"/>
-            <a:ext cx="1267968" cy="1267968"/>
+            <a:off x="4514850" y="3703320"/>
+            <a:ext cx="1371600" cy="1371600"/>
           </a:xfrm>
           <a:prstGeom prst="roundRect">
             <a:avLst>
-              <a:gd name="adj" fmla="val 10096"/>
+              <a:gd name="adj" fmla="val 9333"/>
             </a:avLst>
           </a:prstGeom>
           <a:solidFill>
@@ -9822,7 +9822,7 @@
               <a:buNone/>
             </a:pPr>
             <a:r>
-              <a:rPr lang="ko-KR" altLang="en-US" sz="5500" b="1" dirty="0">
+              <a:rPr lang="ko-KR" altLang="en-US" sz="5900" b="1" dirty="0">
                 <a:solidFill>
                   <a:srgbClr val="1F2937"/>
                 </a:solidFill>
@@ -9832,7 +9832,7 @@
               </a:rPr>
               <a:t>ㄹ</a:t>
             </a:r>
-            <a:endParaRPr lang="ko-KR" sz="5500" dirty="0"/>
+            <a:endParaRPr lang="ko-KR" sz="5900" dirty="0"/>
           </a:p>
         </p:txBody>
       </p:sp>
@@ -9891,12 +9891,12 @@
         </p:nvSpPr>
         <p:spPr>
           <a:xfrm>
-            <a:off x="7072884" y="3755136"/>
-            <a:ext cx="1267968" cy="1267968"/>
+            <a:off x="7098030" y="3703320"/>
+            <a:ext cx="1371600" cy="1371600"/>
           </a:xfrm>
           <a:prstGeom prst="roundRect">
             <a:avLst>
-              <a:gd name="adj" fmla="val 10096"/>
+              <a:gd name="adj" fmla="val 9333"/>
             </a:avLst>
           </a:prstGeom>
           <a:solidFill>
@@ -9916,7 +9916,7 @@
               <a:buNone/>
             </a:pPr>
             <a:r>
-              <a:rPr lang="ko-KR" altLang="en-US" sz="5500" b="1" dirty="0">
+              <a:rPr lang="ko-KR" altLang="en-US" sz="5900" b="1" dirty="0">
                 <a:solidFill>
                   <a:srgbClr val="1F2937"/>
                 </a:solidFill>
@@ -9926,7 +9926,7 @@
               </a:rPr>
               <a:t>ㅎ</a:t>
             </a:r>
-            <a:endParaRPr lang="ko-KR" sz="5500" dirty="0"/>
+            <a:endParaRPr lang="ko-KR" sz="5900" dirty="0"/>
           </a:p>
         </p:txBody>
       </p:sp>
@@ -9938,12 +9938,12 @@
         </p:nvSpPr>
         <p:spPr>
           <a:xfrm>
-            <a:off x="8542020" y="3755136"/>
-            <a:ext cx="1267968" cy="1267968"/>
+            <a:off x="8670798" y="3703320"/>
+            <a:ext cx="1371600" cy="1371600"/>
           </a:xfrm>
           <a:prstGeom prst="roundRect">
             <a:avLst>
-              <a:gd name="adj" fmla="val 10096"/>
+              <a:gd name="adj" fmla="val 9333"/>
             </a:avLst>
           </a:prstGeom>
           <a:solidFill>
@@ -9963,7 +9963,7 @@
               <a:buNone/>
             </a:pPr>
             <a:r>
-              <a:rPr lang="ko-KR" altLang="en-US" sz="5500" b="1" dirty="0">
+              <a:rPr lang="ko-KR" altLang="en-US" sz="5900" b="1" dirty="0">
                 <a:solidFill>
                   <a:srgbClr val="1F2937"/>
                 </a:solidFill>
@@ -9973,7 +9973,7 @@
               </a:rPr>
               <a:t>ㅇ</a:t>
             </a:r>
-            <a:endParaRPr lang="ko-KR" sz="5500" dirty="0"/>
+            <a:endParaRPr lang="ko-KR" sz="5900" dirty="0"/>
           </a:p>
         </p:txBody>
       </p:sp>
@@ -9985,12 +9985,12 @@
         </p:nvSpPr>
         <p:spPr>
           <a:xfrm>
-            <a:off x="10011156" y="3755136"/>
-            <a:ext cx="1267968" cy="1267968"/>
+            <a:off x="10243566" y="3703320"/>
+            <a:ext cx="1371600" cy="1371600"/>
           </a:xfrm>
           <a:prstGeom prst="roundRect">
             <a:avLst>
-              <a:gd name="adj" fmla="val 10096"/>
+              <a:gd name="adj" fmla="val 9333"/>
             </a:avLst>
           </a:prstGeom>
           <a:solidFill>
@@ -10010,7 +10010,7 @@
               <a:buNone/>
             </a:pPr>
             <a:r>
-              <a:rPr lang="ko-KR" altLang="en-US" sz="5500" b="1" dirty="0">
+              <a:rPr lang="ko-KR" altLang="en-US" sz="5900" b="1" dirty="0">
                 <a:solidFill>
                   <a:srgbClr val="1F2937"/>
                 </a:solidFill>
@@ -10020,7 +10020,7 @@
               </a:rPr>
               <a:t>ㅍ</a:t>
             </a:r>
-            <a:endParaRPr lang="ko-KR" sz="5500" dirty="0"/>
+            <a:endParaRPr lang="ko-KR" sz="5900" dirty="0"/>
           </a:p>
         </p:txBody>
       </p:sp>

--- a/dist/초1/국어/한글/초1_국어_한글_02_기본자음_학생용.pptx
+++ b/dist/초1/국어/한글/초1_국어_한글_02_기본자음_학생용.pptx
@@ -119,13 +119,13 @@
   <p:extLst>
     <p:ext uri="{521415D9-36F7-43E2-AB2F-B90AF26B5E84}">
       <p14:sectionLst xmlns:p14="http://schemas.microsoft.com/office/powerpoint/2010/main">
-        <p14:section name="도입" id="{cc30e0ef-742f-c6ae-5ae0-e11a2d3d53d8}">
+        <p14:section name="도입" id="{607afd29-5057-34de-734b-4deb6fda999e}">
           <p14:sldIdLst>
             <p14:sldId id="256"/>
             <p14:sldId id="257"/>
           </p14:sldIdLst>
         </p14:section>
-        <p14:section name="개념" id="{dde48bce-4fb9-a2c8-11f8-5df95817906b}">
+        <p14:section name="개념" id="{d93cde77-f502-094c-4d62-c7110f03c3a3}">
           <p14:sldIdLst>
             <p14:sldId id="258"/>
             <p14:sldId id="259"/>
@@ -133,25 +133,25 @@
             <p14:sldId id="261"/>
           </p14:sldIdLst>
         </p14:section>
-        <p14:section name="연습" id="{b4b66aa3-281a-5519-847c-40b8f0cfd313}">
+        <p14:section name="연습" id="{2132bc77-2e5f-da12-cbcb-5e54cf2b3348}">
           <p14:sldIdLst>
             <p14:sldId id="262"/>
             <p14:sldId id="263"/>
             <p14:sldId id="264"/>
           </p14:sldIdLst>
         </p14:section>
-        <p14:section name="확인" id="{3c7aa034-e742-11f5-7e93-e593355877fa}">
+        <p14:section name="확인" id="{c45fe127-2a3c-93ea-881b-111c968b399b}">
           <p14:sldIdLst>
             <p14:sldId id="265"/>
             <p14:sldId id="266"/>
           </p14:sldIdLst>
         </p14:section>
-        <p14:section name="정리" id="{0b8d4fc3-1558-b573-ac06-a3b4add5ebfb}">
+        <p14:section name="정리" id="{4d332787-65d0-d04b-2ae8-f4f79ad3d41a}">
           <p14:sldIdLst>
             <p14:sldId id="267"/>
           </p14:sldIdLst>
         </p14:section>
-        <p14:section name="보충" id="{7967dd68-4e11-e1ab-df6e-e8b15675ecfc}">
+        <p14:section name="보충" id="{1b01d151-fee3-81c5-dce8-f2eb8234ee79}">
           <p14:sldIdLst>
             <p14:sldId id="268"/>
           </p14:sldIdLst>
